--- a/9차시_Pico2W_초음파.pptx
+++ b/9차시_Pico2W_초음파.pptx
@@ -16626,7 +16626,7 @@
                 <a:ea typeface="Consolas"/>
                 <a:cs typeface="Consolas"/>
               </a:rPr>
-              <a:t>pwm = PWM(Pin(20), freq=1000)</a:t>
+              <a:t>ena = PWM(Pin(22), freq=1000)</a:t>
             </a:r>
           </a:p>
         </p:txBody>
